--- a/Web/ShoppingSystem-Notes.pptx
+++ b/Web/ShoppingSystem-Notes.pptx
@@ -14,11 +14,13 @@
     <p:sldId id="266" r:id="rId9"/>
     <p:sldId id="263" r:id="rId10"/>
     <p:sldId id="265" r:id="rId11"/>
+    <p:sldId id="270" r:id="rId12"/>
+    <p:sldId id="271" r:id="rId13"/>
   </p:sldIdLst>
   <p:sldSz cx="12192000" cy="6858000"/>
   <p:notesSz cx="6858000" cy="9144000"/>
   <p:custDataLst>
-    <p:tags r:id="rId15"/>
+    <p:tags r:id="rId17"/>
   </p:custDataLst>
   <p:defaultTextStyle>
     <a:defPPr>
@@ -11723,6 +11725,92 @@
 </p:sld>
 </file>
 
+<file path=ppt/slides/slide10.xml><?xml version="1.0" encoding="utf-8"?>
+<p:sld xmlns:a="http://schemas.openxmlformats.org/drawingml/2006/main" xmlns:r="http://schemas.openxmlformats.org/officeDocument/2006/relationships" xmlns:p="http://schemas.openxmlformats.org/presentationml/2006/main">
+  <p:cSld>
+    <p:spTree>
+      <p:nvGrpSpPr>
+        <p:cNvPr id="1" name=""/>
+        <p:cNvGrpSpPr/>
+        <p:nvPr/>
+      </p:nvGrpSpPr>
+      <p:grpSpPr/>
+      <p:sp>
+        <p:nvSpPr>
+          <p:cNvPr id="2" name="标题 1"/>
+          <p:cNvSpPr>
+            <a:spLocks noGrp="1"/>
+          </p:cNvSpPr>
+          <p:nvPr>
+            <p:ph type="title"/>
+          </p:nvPr>
+        </p:nvSpPr>
+        <p:spPr/>
+        <p:txBody>
+          <a:bodyPr/>
+          <a:p>
+            <a:r>
+              <a:rPr lang="en-US" altLang="zh-CN"/>
+              <a:t>PayPal</a:t>
+            </a:r>
+            <a:endParaRPr lang="en-US" altLang="zh-CN"/>
+          </a:p>
+        </p:txBody>
+      </p:sp>
+      <p:sp>
+        <p:nvSpPr>
+          <p:cNvPr id="3" name="内容占位符 2"/>
+          <p:cNvSpPr>
+            <a:spLocks noGrp="1"/>
+          </p:cNvSpPr>
+          <p:nvPr>
+            <p:ph idx="1"/>
+          </p:nvPr>
+        </p:nvSpPr>
+        <p:spPr>
+          <a:xfrm>
+            <a:off x="669925" y="952500"/>
+            <a:ext cx="6187440" cy="5388610"/>
+          </a:xfrm>
+        </p:spPr>
+        <p:txBody>
+          <a:bodyPr/>
+          <a:p>
+            <a:r>
+              <a:rPr lang="zh-CN" altLang="en-US"/>
+              <a:t>参考</a:t>
+            </a:r>
+            <a:endParaRPr lang="zh-CN" altLang="en-US"/>
+          </a:p>
+          <a:p>
+            <a:pPr lvl="1"/>
+            <a:r>
+              <a:rPr lang="en-US" altLang="zh-CN"/>
+              <a:t>https://zhuanlan.zhihu.com/p/357219845</a:t>
+            </a:r>
+            <a:endParaRPr lang="en-US" altLang="zh-CN"/>
+          </a:p>
+          <a:p>
+            <a:pPr lvl="1"/>
+            <a:r>
+              <a:rPr lang="en-US" altLang="zh-CN"/>
+              <a:t>https://www.cnblogs.com/rickzhai/p/7924181.html</a:t>
+            </a:r>
+            <a:endParaRPr lang="en-US" altLang="zh-CN"/>
+          </a:p>
+        </p:txBody>
+      </p:sp>
+    </p:spTree>
+    <p:custDataLst>
+      <p:tags r:id="rId1"/>
+    </p:custDataLst>
+  </p:cSld>
+  <p:clrMapOvr>
+    <a:masterClrMapping/>
+  </p:clrMapOvr>
+</p:sld>
+</file>
+
 <file path=ppt/slides/slide2.xml><?xml version="1.0" encoding="utf-8"?>
 <p:sld xmlns:a="http://schemas.openxmlformats.org/drawingml/2006/main" xmlns:r="http://schemas.openxmlformats.org/officeDocument/2006/relationships" xmlns:p="http://schemas.openxmlformats.org/presentationml/2006/main">
   <p:cSld>
@@ -13477,6 +13565,82 @@
 </p:sld>
 </file>
 
+<file path=ppt/slides/slide9.xml><?xml version="1.0" encoding="utf-8"?>
+<p:sld xmlns:a="http://schemas.openxmlformats.org/drawingml/2006/main" xmlns:r="http://schemas.openxmlformats.org/officeDocument/2006/relationships" xmlns:p="http://schemas.openxmlformats.org/presentationml/2006/main">
+  <p:cSld>
+    <p:spTree>
+      <p:nvGrpSpPr>
+        <p:cNvPr id="1" name=""/>
+        <p:cNvGrpSpPr/>
+        <p:nvPr/>
+      </p:nvGrpSpPr>
+      <p:grpSpPr/>
+      <p:sp>
+        <p:nvSpPr>
+          <p:cNvPr id="2" name="标题 1"/>
+          <p:cNvSpPr>
+            <a:spLocks noGrp="1"/>
+          </p:cNvSpPr>
+          <p:nvPr>
+            <p:ph type="title"/>
+          </p:nvPr>
+        </p:nvSpPr>
+        <p:spPr/>
+        <p:txBody>
+          <a:bodyPr/>
+          <a:p>
+            <a:r>
+              <a:rPr lang="zh-CN" altLang="en-US"/>
+              <a:t>支付宝</a:t>
+            </a:r>
+            <a:endParaRPr lang="zh-CN" altLang="en-US"/>
+          </a:p>
+        </p:txBody>
+      </p:sp>
+      <p:sp>
+        <p:nvSpPr>
+          <p:cNvPr id="3" name="内容占位符 2"/>
+          <p:cNvSpPr>
+            <a:spLocks noGrp="1"/>
+          </p:cNvSpPr>
+          <p:nvPr>
+            <p:ph idx="1"/>
+          </p:nvPr>
+        </p:nvSpPr>
+        <p:spPr>
+          <a:xfrm>
+            <a:off x="669925" y="952500"/>
+            <a:ext cx="5425440" cy="5388610"/>
+          </a:xfrm>
+        </p:spPr>
+        <p:txBody>
+          <a:bodyPr/>
+          <a:p>
+            <a:r>
+              <a:t>参考</a:t>
+            </a:r>
+          </a:p>
+          <a:p>
+            <a:pPr lvl="1"/>
+            <a:r>
+              <a:rPr lang="en-US" altLang="zh-CN"/>
+              <a:t>https://opendocs.alipay.com/open/02awe1</a:t>
+            </a:r>
+            <a:endParaRPr lang="en-US" altLang="zh-CN"/>
+          </a:p>
+        </p:txBody>
+      </p:sp>
+    </p:spTree>
+    <p:custDataLst>
+      <p:tags r:id="rId1"/>
+    </p:custDataLst>
+  </p:cSld>
+  <p:clrMapOvr>
+    <a:masterClrMapping/>
+  </p:clrMapOvr>
+</p:sld>
+</file>
+
 <file path=ppt/tags/tag1.xml><?xml version="1.0" encoding="utf-8"?>
 <p:tagLst xmlns:p="http://schemas.openxmlformats.org/presentationml/2006/main">
   <p:tag name="KSO_WM_UNIT_HIGHLIGHT" val="0"/>
@@ -14230,6 +14394,22 @@
 </file>
 
 <file path=ppt/tags/tag145.xml><?xml version="1.0" encoding="utf-8"?>
+<p:tagLst xmlns:p="http://schemas.openxmlformats.org/presentationml/2006/main">
+  <p:tag name="KSO_WM_BEAUTIFY_FLAG" val="#wm#"/>
+  <p:tag name="KSO_WM_TEMPLATE_CATEGORY" val="custom"/>
+  <p:tag name="KSO_WM_TEMPLATE_INDEX" val="20229149"/>
+</p:tagLst>
+</file>
+
+<file path=ppt/tags/tag146.xml><?xml version="1.0" encoding="utf-8"?>
+<p:tagLst xmlns:p="http://schemas.openxmlformats.org/presentationml/2006/main">
+  <p:tag name="KSO_WM_BEAUTIFY_FLAG" val="#wm#"/>
+  <p:tag name="KSO_WM_TEMPLATE_CATEGORY" val="custom"/>
+  <p:tag name="KSO_WM_TEMPLATE_INDEX" val="20229149"/>
+</p:tagLst>
+</file>
+
+<file path=ppt/tags/tag147.xml><?xml version="1.0" encoding="utf-8"?>
 <p:tagLst xmlns:p="http://schemas.openxmlformats.org/presentationml/2006/main">
   <p:tag name="commondata" val="eyJoZGlkIjoiYjRhZjQ5NWVmZmQxNmM3NmNkNDYxNWRmNzNmMjA1ZDAifQ=="/>
 </p:tagLst>
